--- a/00_presentation/2026/azureTimes201/AzureTimes_201.pptx
+++ b/00_presentation/2026/azureTimes201/AzureTimes_201.pptx
@@ -423,7 +423,7 @@
           <a:p>
             <a:fld id="{3FDC14FC-A894-4869-A797-1EC82735D106}" type="datetimeFigureOut">
               <a:rPr lang="en-US" smtClean="0"/>
-              <a:t>4/9/2026</a:t>
+              <a:t>4/10/2026</a:t>
             </a:fld>
             <a:endParaRPr lang="en-US"/>
           </a:p>
@@ -588,7 +588,7 @@
           <a:p>
             <a:fld id="{B4F99C05-63F9-4248-8E20-3ACD9DF9DE7F}" type="datetimeFigureOut">
               <a:rPr lang="en-US" smtClean="0"/>
-              <a:t>4/9/2026</a:t>
+              <a:t>4/10/2026</a:t>
             </a:fld>
             <a:endParaRPr lang="en-US"/>
           </a:p>
@@ -14805,7 +14805,24 @@
               <a:rPr lang="en-US" dirty="0">
                 <a:hlinkClick r:id="rId2"/>
               </a:rPr>
-              <a:t>Azure Times GitHub Repo</a:t>
+              <a:t>AzureTimes.org</a:t>
+            </a:r>
+            <a:endParaRPr lang="en-US" dirty="0">
+              <a:hlinkClick r:id="rId3"/>
+            </a:endParaRPr>
+          </a:p>
+          <a:p>
+            <a:r>
+              <a:rPr lang="en-US">
+                <a:hlinkClick r:id="rId3"/>
+              </a:rPr>
+              <a:t>Azure </a:t>
+            </a:r>
+            <a:r>
+              <a:rPr lang="en-US" dirty="0">
+                <a:hlinkClick r:id="rId3"/>
+              </a:rPr>
+              <a:t>Times GitHub Repo</a:t>
             </a:r>
             <a:endParaRPr lang="en-US" dirty="0"/>
           </a:p>
@@ -18343,15 +18360,6 @@
 </file>
 
 <file path=customXml/item1.xml><?xml version="1.0" encoding="utf-8"?>
-<?mso-contentType ?>
-<FormTemplates xmlns="http://schemas.microsoft.com/sharepoint/v3/contenttype/forms">
-  <Display>DocumentLibraryForm</Display>
-  <Edit>DocumentLibraryForm</Edit>
-  <New>DocumentLibraryForm</New>
-</FormTemplates>
-</file>
-
-<file path=customXml/item2.xml><?xml version="1.0" encoding="utf-8"?>
 <ct:contentTypeSchema xmlns:ct="http://schemas.microsoft.com/office/2006/metadata/contentType" xmlns:ma="http://schemas.microsoft.com/office/2006/metadata/properties/metaAttributes" ct:_="" ma:_="" ma:contentTypeName="Document" ma:contentTypeID="0x0101008C3A9FD6A1D2BC41832AF270024651C7" ma:contentTypeVersion="6" ma:contentTypeDescription="Create a new document." ma:contentTypeScope="" ma:versionID="0421700c9180782018be286cde8a21da">
   <xsd:schema xmlns:xsd="http://www.w3.org/2001/XMLSchema" xmlns:xs="http://www.w3.org/2001/XMLSchema" xmlns:p="http://schemas.microsoft.com/office/2006/metadata/properties" xmlns:ns2="2e7e23d5-2c80-4164-89d2-1708db4037b8" xmlns:ns3="4e7ac07f-2cd6-47aa-8863-e3015989625c" targetNamespace="http://schemas.microsoft.com/office/2006/metadata/properties" ma:root="true" ma:fieldsID="541d07e3f89946b63e942fc7370dae48" ns2:_="" ns3:_="">
     <xsd:import namespace="2e7e23d5-2c80-4164-89d2-1708db4037b8"/>
@@ -18530,21 +18538,22 @@
 </ct:contentTypeSchema>
 </file>
 
-<file path=customXml/item3.xml><?xml version="1.0" encoding="utf-8"?>
+<file path=customXml/item2.xml><?xml version="1.0" encoding="utf-8"?>
 <p:properties xmlns:p="http://schemas.microsoft.com/office/2006/metadata/properties" xmlns:xsi="http://www.w3.org/2001/XMLSchema-instance" xmlns:pc="http://schemas.microsoft.com/office/infopath/2007/PartnerControls">
   <documentManagement/>
 </p:properties>
 </file>
 
-<file path=customXml/itemProps1.xml><?xml version="1.0" encoding="utf-8"?>
-<ds:datastoreItem xmlns:ds="http://schemas.openxmlformats.org/officeDocument/2006/customXml" ds:itemID="{EE04B39D-0CBA-4F8F-8809-785207E87965}">
-  <ds:schemaRefs>
-    <ds:schemaRef ds:uri="http://schemas.microsoft.com/sharepoint/v3/contenttype/forms"/>
-  </ds:schemaRefs>
-</ds:datastoreItem>
+<file path=customXml/item3.xml><?xml version="1.0" encoding="utf-8"?>
+<?mso-contentType ?>
+<FormTemplates xmlns="http://schemas.microsoft.com/sharepoint/v3/contenttype/forms">
+  <Display>DocumentLibraryForm</Display>
+  <Edit>DocumentLibraryForm</Edit>
+  <New>DocumentLibraryForm</New>
+</FormTemplates>
 </file>
 
-<file path=customXml/itemProps2.xml><?xml version="1.0" encoding="utf-8"?>
+<file path=customXml/itemProps1.xml><?xml version="1.0" encoding="utf-8"?>
 <ds:datastoreItem xmlns:ds="http://schemas.openxmlformats.org/officeDocument/2006/customXml" ds:itemID="{25D63988-C0DC-4185-91C3-6687DBA2F390}">
   <ds:schemaRefs>
     <ds:schemaRef ds:uri="2e7e23d5-2c80-4164-89d2-1708db4037b8"/>
@@ -18563,7 +18572,7 @@
 </ds:datastoreItem>
 </file>
 
-<file path=customXml/itemProps3.xml><?xml version="1.0" encoding="utf-8"?>
+<file path=customXml/itemProps2.xml><?xml version="1.0" encoding="utf-8"?>
 <ds:datastoreItem xmlns:ds="http://schemas.openxmlformats.org/officeDocument/2006/customXml" ds:itemID="{4DE7C614-AA74-4D4D-9D2D-D96DA5126C78}">
   <ds:schemaRefs>
     <ds:schemaRef ds:uri="http://schemas.microsoft.com/office/2006/metadata/properties"/>
@@ -18580,6 +18589,14 @@
 </ds:datastoreItem>
 </file>
 
+<file path=customXml/itemProps3.xml><?xml version="1.0" encoding="utf-8"?>
+<ds:datastoreItem xmlns:ds="http://schemas.openxmlformats.org/officeDocument/2006/customXml" ds:itemID="{EE04B39D-0CBA-4F8F-8809-785207E87965}">
+  <ds:schemaRefs>
+    <ds:schemaRef ds:uri="http://schemas.microsoft.com/sharepoint/v3/contenttype/forms"/>
+  </ds:schemaRefs>
+</ds:datastoreItem>
+</file>
+
 <file path=docMetadata/LabelInfo.xml><?xml version="1.0" encoding="utf-8"?>
 <clbl:labelList xmlns:clbl="http://schemas.microsoft.com/office/2020/mipLabelMetadata">
   <clbl:label id="{2590e1b2-66ea-4d45-b1aa-185c322e3ba5}" enabled="1" method="Standard" siteId="{40a64d0b-f2f9-4a34-b1b3-0992ac0e5e4e}" contentBits="0" removed="0"/>

--- a/00_presentation/2026/azureTimes201/AzureTimes_201.pptx
+++ b/00_presentation/2026/azureTimes201/AzureTimes_201.pptx
@@ -5,10 +5,10 @@
     <p:sldMasterId id="2147483812" r:id="rId4"/>
   </p:sldMasterIdLst>
   <p:notesMasterIdLst>
-    <p:notesMasterId r:id="rId45"/>
+    <p:notesMasterId r:id="rId46"/>
   </p:notesMasterIdLst>
   <p:handoutMasterIdLst>
-    <p:handoutMasterId r:id="rId46"/>
+    <p:handoutMasterId r:id="rId47"/>
   </p:handoutMasterIdLst>
   <p:sldIdLst>
     <p:sldId id="2142532340" r:id="rId5"/>
@@ -43,14 +43,15 @@
     <p:sldId id="2146847054" r:id="rId34"/>
     <p:sldId id="2146847141" r:id="rId35"/>
     <p:sldId id="2146847056" r:id="rId36"/>
-    <p:sldId id="2146847144" r:id="rId37"/>
-    <p:sldId id="2146847058" r:id="rId38"/>
-    <p:sldId id="2146847111" r:id="rId39"/>
-    <p:sldId id="2146847062" r:id="rId40"/>
-    <p:sldId id="2146847115" r:id="rId41"/>
-    <p:sldId id="2146847085" r:id="rId42"/>
-    <p:sldId id="2146847084" r:id="rId43"/>
-    <p:sldId id="2146847064" r:id="rId44"/>
+    <p:sldId id="2146847173" r:id="rId37"/>
+    <p:sldId id="2146847144" r:id="rId38"/>
+    <p:sldId id="2146847058" r:id="rId39"/>
+    <p:sldId id="2146847111" r:id="rId40"/>
+    <p:sldId id="2146847062" r:id="rId41"/>
+    <p:sldId id="2146847115" r:id="rId42"/>
+    <p:sldId id="2146847085" r:id="rId43"/>
+    <p:sldId id="2146847084" r:id="rId44"/>
+    <p:sldId id="2146847064" r:id="rId45"/>
   </p:sldIdLst>
   <p:sldSz cx="9144000" cy="5143500" type="screen16x9"/>
   <p:notesSz cx="6858000" cy="9144000"/>
@@ -213,6 +214,7 @@
         <p14:section name="Integration" id="{ACBD46A3-6F1C-451B-A154-0A056E0DEFF6}">
           <p14:sldIdLst>
             <p14:sldId id="2146847056"/>
+            <p14:sldId id="2146847173"/>
             <p14:sldId id="2146847144"/>
           </p14:sldIdLst>
         </p14:section>
@@ -423,7 +425,7 @@
           <a:p>
             <a:fld id="{3FDC14FC-A894-4869-A797-1EC82735D106}" type="datetimeFigureOut">
               <a:rPr lang="en-US" smtClean="0"/>
-              <a:t>4/10/2026</a:t>
+              <a:t>4/11/2026</a:t>
             </a:fld>
             <a:endParaRPr lang="en-US"/>
           </a:p>
@@ -588,7 +590,7 @@
           <a:p>
             <a:fld id="{B4F99C05-63F9-4248-8E20-3ACD9DF9DE7F}" type="datetimeFigureOut">
               <a:rPr lang="en-US" smtClean="0"/>
-              <a:t>4/10/2026</a:t>
+              <a:t>4/11/2026</a:t>
             </a:fld>
             <a:endParaRPr lang="en-US"/>
           </a:p>
@@ -13490,6 +13492,543 @@
         <p:cNvPr id="1" name="">
           <a:extLst>
             <a:ext uri="{FF2B5EF4-FFF2-40B4-BE49-F238E27FC236}">
+              <a16:creationId xmlns:a16="http://schemas.microsoft.com/office/drawing/2014/main" id="{8199645A-C597-E4F2-8949-8DABAEF7CEF6}"/>
+            </a:ext>
+          </a:extLst>
+        </p:cNvPr>
+        <p:cNvGrpSpPr/>
+        <p:nvPr/>
+      </p:nvGrpSpPr>
+      <p:grpSpPr>
+        <a:xfrm>
+          <a:off x="0" y="0"/>
+          <a:ext cx="0" cy="0"/>
+          <a:chOff x="0" y="0"/>
+          <a:chExt cx="0" cy="0"/>
+        </a:xfrm>
+      </p:grpSpPr>
+      <p:sp>
+        <p:nvSpPr>
+          <p:cNvPr id="12" name="Text Placeholder 11">
+            <a:extLst>
+              <a:ext uri="{FF2B5EF4-FFF2-40B4-BE49-F238E27FC236}">
+                <a16:creationId xmlns:a16="http://schemas.microsoft.com/office/drawing/2014/main" id="{12EF78E5-EE3C-C017-2A4D-E82D441A9239}"/>
+              </a:ext>
+            </a:extLst>
+          </p:cNvPr>
+          <p:cNvSpPr>
+            <a:spLocks noGrp="1"/>
+          </p:cNvSpPr>
+          <p:nvPr>
+            <p:ph type="body" sz="quarter" idx="10"/>
+          </p:nvPr>
+        </p:nvSpPr>
+        <p:spPr/>
+        <p:txBody>
+          <a:bodyPr/>
+          <a:lstStyle/>
+          <a:p>
+            <a:endParaRPr lang="en-US" sz="1000" dirty="0"/>
+          </a:p>
+        </p:txBody>
+      </p:sp>
+      <p:sp>
+        <p:nvSpPr>
+          <p:cNvPr id="11" name="Title 10">
+            <a:extLst>
+              <a:ext uri="{FF2B5EF4-FFF2-40B4-BE49-F238E27FC236}">
+                <a16:creationId xmlns:a16="http://schemas.microsoft.com/office/drawing/2014/main" id="{BB1CBDDD-E4AC-1C63-2D1B-F31D6F869310}"/>
+              </a:ext>
+            </a:extLst>
+          </p:cNvPr>
+          <p:cNvSpPr>
+            <a:spLocks noGrp="1"/>
+          </p:cNvSpPr>
+          <p:nvPr>
+            <p:ph type="title"/>
+          </p:nvPr>
+        </p:nvSpPr>
+        <p:spPr/>
+        <p:txBody>
+          <a:bodyPr/>
+          <a:lstStyle/>
+          <a:p>
+            <a:r>
+              <a:rPr lang="en-US" sz="1800" dirty="0"/>
+              <a:t>Integration Updates</a:t>
+            </a:r>
+            <a:endParaRPr lang="en-US" dirty="0"/>
+          </a:p>
+        </p:txBody>
+      </p:sp>
+      <p:sp>
+        <p:nvSpPr>
+          <p:cNvPr id="13" name="Text Placeholder 12">
+            <a:extLst>
+              <a:ext uri="{FF2B5EF4-FFF2-40B4-BE49-F238E27FC236}">
+                <a16:creationId xmlns:a16="http://schemas.microsoft.com/office/drawing/2014/main" id="{B6A8A55E-A12B-CF18-F01F-2420321445C6}"/>
+              </a:ext>
+            </a:extLst>
+          </p:cNvPr>
+          <p:cNvSpPr>
+            <a:spLocks noGrp="1"/>
+          </p:cNvSpPr>
+          <p:nvPr>
+            <p:ph type="body" sz="quarter" idx="15"/>
+          </p:nvPr>
+        </p:nvSpPr>
+        <p:spPr/>
+        <p:txBody>
+          <a:bodyPr/>
+          <a:lstStyle/>
+          <a:p>
+            <a:endParaRPr lang="en-US"/>
+          </a:p>
+        </p:txBody>
+      </p:sp>
+      <p:sp>
+        <p:nvSpPr>
+          <p:cNvPr id="14" name="Text Placeholder 13">
+            <a:extLst>
+              <a:ext uri="{FF2B5EF4-FFF2-40B4-BE49-F238E27FC236}">
+                <a16:creationId xmlns:a16="http://schemas.microsoft.com/office/drawing/2014/main" id="{FF7B9BC2-5F51-6927-CDC5-C62C488570B4}"/>
+              </a:ext>
+            </a:extLst>
+          </p:cNvPr>
+          <p:cNvSpPr>
+            <a:spLocks noGrp="1"/>
+          </p:cNvSpPr>
+          <p:nvPr>
+            <p:ph type="body" sz="quarter" idx="16"/>
+          </p:nvPr>
+        </p:nvSpPr>
+        <p:spPr/>
+        <p:txBody>
+          <a:bodyPr/>
+          <a:lstStyle/>
+          <a:p>
+            <a:pPr algn="just"/>
+            <a:r>
+              <a:rPr lang="en-US" dirty="0">
+                <a:hlinkClick r:id="rId2"/>
+              </a:rPr>
+              <a:t>Public Preview: Event Grid as a destination for Stripe events now in Public Preview</a:t>
+            </a:r>
+            <a:endParaRPr lang="en-US" dirty="0"/>
+          </a:p>
+          <a:p>
+            <a:pPr algn="just"/>
+            <a:r>
+              <a:rPr lang="en-US" dirty="0"/>
+              <a:t>Developers can now route Stripe events directly into Azure Event Grid and build scalable, event-driven architectures without managing webhook infrastructure or custom </a:t>
+            </a:r>
+            <a:r>
+              <a:rPr lang="en-US" dirty="0" err="1"/>
+              <a:t>brokers.This</a:t>
+            </a:r>
+            <a:r>
+              <a:rPr lang="en-US" dirty="0"/>
+              <a:t> means that Event Grid acts as a fully managed event broker between Stripe and other Azure services.</a:t>
+            </a:r>
+            <a:br>
+              <a:rPr lang="en-US" dirty="0"/>
+            </a:br>
+            <a:r>
+              <a:rPr lang="en-US" dirty="0"/>
+              <a:t>Now Event Grid can automatically deliver Stripe events to Azure subscribers including:</a:t>
+            </a:r>
+          </a:p>
+          <a:p>
+            <a:pPr algn="just"/>
+            <a:r>
+              <a:rPr lang="en-US" dirty="0"/>
+              <a:t>Azure Functions</a:t>
+            </a:r>
+          </a:p>
+          <a:p>
+            <a:pPr algn="just"/>
+            <a:r>
+              <a:rPr lang="en-US" dirty="0"/>
+              <a:t>Logic Apps</a:t>
+            </a:r>
+          </a:p>
+          <a:p>
+            <a:pPr algn="just"/>
+            <a:r>
+              <a:rPr lang="en-US" dirty="0"/>
+              <a:t>Event Hubs</a:t>
+            </a:r>
+          </a:p>
+          <a:p>
+            <a:pPr algn="just"/>
+            <a:r>
+              <a:rPr lang="en-US" dirty="0"/>
+              <a:t>Service Bus</a:t>
+            </a:r>
+          </a:p>
+          <a:p>
+            <a:pPr algn="just"/>
+            <a:endParaRPr lang="en-US" dirty="0"/>
+          </a:p>
+        </p:txBody>
+      </p:sp>
+    </p:spTree>
+    <p:extLst>
+      <p:ext uri="{BB962C8B-B14F-4D97-AF65-F5344CB8AC3E}">
+        <p14:creationId xmlns:p14="http://schemas.microsoft.com/office/powerpoint/2010/main" val="3604598520"/>
+      </p:ext>
+    </p:extLst>
+  </p:cSld>
+  <p:clrMapOvr>
+    <a:masterClrMapping/>
+  </p:clrMapOvr>
+  <mc:AlternateContent xmlns:mc="http://schemas.openxmlformats.org/markup-compatibility/2006" xmlns:p14="http://schemas.microsoft.com/office/powerpoint/2010/main">
+    <mc:Choice Requires="p14">
+      <p:transition spd="med" p14:dur="700">
+        <p:fade/>
+      </p:transition>
+    </mc:Choice>
+    <mc:Fallback xmlns="">
+      <p:transition spd="med">
+        <p:fade/>
+      </p:transition>
+    </mc:Fallback>
+  </mc:AlternateContent>
+  <p:timing>
+    <p:tnLst>
+      <p:par>
+        <p:cTn id="1" dur="indefinite" restart="never" nodeType="tmRoot">
+          <p:childTnLst>
+            <p:seq concurrent="1" nextAc="seek">
+              <p:cTn id="2" dur="indefinite" nodeType="mainSeq">
+                <p:childTnLst>
+                  <p:par>
+                    <p:cTn id="3" fill="hold">
+                      <p:stCondLst>
+                        <p:cond delay="indefinite"/>
+                      </p:stCondLst>
+                      <p:childTnLst>
+                        <p:par>
+                          <p:cTn id="4" fill="hold">
+                            <p:stCondLst>
+                              <p:cond delay="0"/>
+                            </p:stCondLst>
+                            <p:childTnLst>
+                              <p:par>
+                                <p:cTn id="5" presetID="1" presetClass="entr" presetSubtype="0" fill="hold" nodeType="clickEffect">
+                                  <p:stCondLst>
+                                    <p:cond delay="0"/>
+                                  </p:stCondLst>
+                                  <p:childTnLst>
+                                    <p:set>
+                                      <p:cBhvr>
+                                        <p:cTn id="6" dur="1" fill="hold">
+                                          <p:stCondLst>
+                                            <p:cond delay="0"/>
+                                          </p:stCondLst>
+                                        </p:cTn>
+                                        <p:tgtEl>
+                                          <p:spTgt spid="14">
+                                            <p:txEl>
+                                              <p:pRg st="0" end="0"/>
+                                            </p:txEl>
+                                          </p:spTgt>
+                                        </p:tgtEl>
+                                        <p:attrNameLst>
+                                          <p:attrName>style.visibility</p:attrName>
+                                        </p:attrNameLst>
+                                      </p:cBhvr>
+                                      <p:to>
+                                        <p:strVal val="visible"/>
+                                      </p:to>
+                                    </p:set>
+                                  </p:childTnLst>
+                                </p:cTn>
+                              </p:par>
+                            </p:childTnLst>
+                          </p:cTn>
+                        </p:par>
+                      </p:childTnLst>
+                    </p:cTn>
+                  </p:par>
+                  <p:par>
+                    <p:cTn id="7" fill="hold">
+                      <p:stCondLst>
+                        <p:cond delay="indefinite"/>
+                      </p:stCondLst>
+                      <p:childTnLst>
+                        <p:par>
+                          <p:cTn id="8" fill="hold">
+                            <p:stCondLst>
+                              <p:cond delay="0"/>
+                            </p:stCondLst>
+                            <p:childTnLst>
+                              <p:par>
+                                <p:cTn id="9" presetID="1" presetClass="entr" presetSubtype="0" fill="hold" nodeType="clickEffect">
+                                  <p:stCondLst>
+                                    <p:cond delay="0"/>
+                                  </p:stCondLst>
+                                  <p:childTnLst>
+                                    <p:set>
+                                      <p:cBhvr>
+                                        <p:cTn id="10" dur="1" fill="hold">
+                                          <p:stCondLst>
+                                            <p:cond delay="0"/>
+                                          </p:stCondLst>
+                                        </p:cTn>
+                                        <p:tgtEl>
+                                          <p:spTgt spid="14">
+                                            <p:txEl>
+                                              <p:pRg st="1" end="1"/>
+                                            </p:txEl>
+                                          </p:spTgt>
+                                        </p:tgtEl>
+                                        <p:attrNameLst>
+                                          <p:attrName>style.visibility</p:attrName>
+                                        </p:attrNameLst>
+                                      </p:cBhvr>
+                                      <p:to>
+                                        <p:strVal val="visible"/>
+                                      </p:to>
+                                    </p:set>
+                                  </p:childTnLst>
+                                </p:cTn>
+                              </p:par>
+                            </p:childTnLst>
+                          </p:cTn>
+                        </p:par>
+                      </p:childTnLst>
+                    </p:cTn>
+                  </p:par>
+                  <p:par>
+                    <p:cTn id="11" fill="hold">
+                      <p:stCondLst>
+                        <p:cond delay="indefinite"/>
+                      </p:stCondLst>
+                      <p:childTnLst>
+                        <p:par>
+                          <p:cTn id="12" fill="hold">
+                            <p:stCondLst>
+                              <p:cond delay="0"/>
+                            </p:stCondLst>
+                            <p:childTnLst>
+                              <p:par>
+                                <p:cTn id="13" presetID="1" presetClass="entr" presetSubtype="0" fill="hold" nodeType="clickEffect">
+                                  <p:stCondLst>
+                                    <p:cond delay="0"/>
+                                  </p:stCondLst>
+                                  <p:childTnLst>
+                                    <p:set>
+                                      <p:cBhvr>
+                                        <p:cTn id="14" dur="1" fill="hold">
+                                          <p:stCondLst>
+                                            <p:cond delay="0"/>
+                                          </p:stCondLst>
+                                        </p:cTn>
+                                        <p:tgtEl>
+                                          <p:spTgt spid="14">
+                                            <p:txEl>
+                                              <p:pRg st="2" end="2"/>
+                                            </p:txEl>
+                                          </p:spTgt>
+                                        </p:tgtEl>
+                                        <p:attrNameLst>
+                                          <p:attrName>style.visibility</p:attrName>
+                                        </p:attrNameLst>
+                                      </p:cBhvr>
+                                      <p:to>
+                                        <p:strVal val="visible"/>
+                                      </p:to>
+                                    </p:set>
+                                  </p:childTnLst>
+                                </p:cTn>
+                              </p:par>
+                            </p:childTnLst>
+                          </p:cTn>
+                        </p:par>
+                      </p:childTnLst>
+                    </p:cTn>
+                  </p:par>
+                  <p:par>
+                    <p:cTn id="15" fill="hold">
+                      <p:stCondLst>
+                        <p:cond delay="indefinite"/>
+                      </p:stCondLst>
+                      <p:childTnLst>
+                        <p:par>
+                          <p:cTn id="16" fill="hold">
+                            <p:stCondLst>
+                              <p:cond delay="0"/>
+                            </p:stCondLst>
+                            <p:childTnLst>
+                              <p:par>
+                                <p:cTn id="17" presetID="1" presetClass="entr" presetSubtype="0" fill="hold" nodeType="clickEffect">
+                                  <p:stCondLst>
+                                    <p:cond delay="0"/>
+                                  </p:stCondLst>
+                                  <p:childTnLst>
+                                    <p:set>
+                                      <p:cBhvr>
+                                        <p:cTn id="18" dur="1" fill="hold">
+                                          <p:stCondLst>
+                                            <p:cond delay="0"/>
+                                          </p:stCondLst>
+                                        </p:cTn>
+                                        <p:tgtEl>
+                                          <p:spTgt spid="14">
+                                            <p:txEl>
+                                              <p:pRg st="3" end="3"/>
+                                            </p:txEl>
+                                          </p:spTgt>
+                                        </p:tgtEl>
+                                        <p:attrNameLst>
+                                          <p:attrName>style.visibility</p:attrName>
+                                        </p:attrNameLst>
+                                      </p:cBhvr>
+                                      <p:to>
+                                        <p:strVal val="visible"/>
+                                      </p:to>
+                                    </p:set>
+                                  </p:childTnLst>
+                                </p:cTn>
+                              </p:par>
+                            </p:childTnLst>
+                          </p:cTn>
+                        </p:par>
+                      </p:childTnLst>
+                    </p:cTn>
+                  </p:par>
+                  <p:par>
+                    <p:cTn id="19" fill="hold">
+                      <p:stCondLst>
+                        <p:cond delay="indefinite"/>
+                      </p:stCondLst>
+                      <p:childTnLst>
+                        <p:par>
+                          <p:cTn id="20" fill="hold">
+                            <p:stCondLst>
+                              <p:cond delay="0"/>
+                            </p:stCondLst>
+                            <p:childTnLst>
+                              <p:par>
+                                <p:cTn id="21" presetID="1" presetClass="entr" presetSubtype="0" fill="hold" nodeType="clickEffect">
+                                  <p:stCondLst>
+                                    <p:cond delay="0"/>
+                                  </p:stCondLst>
+                                  <p:childTnLst>
+                                    <p:set>
+                                      <p:cBhvr>
+                                        <p:cTn id="22" dur="1" fill="hold">
+                                          <p:stCondLst>
+                                            <p:cond delay="0"/>
+                                          </p:stCondLst>
+                                        </p:cTn>
+                                        <p:tgtEl>
+                                          <p:spTgt spid="14">
+                                            <p:txEl>
+                                              <p:pRg st="4" end="4"/>
+                                            </p:txEl>
+                                          </p:spTgt>
+                                        </p:tgtEl>
+                                        <p:attrNameLst>
+                                          <p:attrName>style.visibility</p:attrName>
+                                        </p:attrNameLst>
+                                      </p:cBhvr>
+                                      <p:to>
+                                        <p:strVal val="visible"/>
+                                      </p:to>
+                                    </p:set>
+                                  </p:childTnLst>
+                                </p:cTn>
+                              </p:par>
+                            </p:childTnLst>
+                          </p:cTn>
+                        </p:par>
+                      </p:childTnLst>
+                    </p:cTn>
+                  </p:par>
+                  <p:par>
+                    <p:cTn id="23" fill="hold">
+                      <p:stCondLst>
+                        <p:cond delay="indefinite"/>
+                      </p:stCondLst>
+                      <p:childTnLst>
+                        <p:par>
+                          <p:cTn id="24" fill="hold">
+                            <p:stCondLst>
+                              <p:cond delay="0"/>
+                            </p:stCondLst>
+                            <p:childTnLst>
+                              <p:par>
+                                <p:cTn id="25" presetID="1" presetClass="entr" presetSubtype="0" fill="hold" nodeType="clickEffect">
+                                  <p:stCondLst>
+                                    <p:cond delay="0"/>
+                                  </p:stCondLst>
+                                  <p:childTnLst>
+                                    <p:set>
+                                      <p:cBhvr>
+                                        <p:cTn id="26" dur="1" fill="hold">
+                                          <p:stCondLst>
+                                            <p:cond delay="0"/>
+                                          </p:stCondLst>
+                                        </p:cTn>
+                                        <p:tgtEl>
+                                          <p:spTgt spid="14">
+                                            <p:txEl>
+                                              <p:pRg st="5" end="5"/>
+                                            </p:txEl>
+                                          </p:spTgt>
+                                        </p:tgtEl>
+                                        <p:attrNameLst>
+                                          <p:attrName>style.visibility</p:attrName>
+                                        </p:attrNameLst>
+                                      </p:cBhvr>
+                                      <p:to>
+                                        <p:strVal val="visible"/>
+                                      </p:to>
+                                    </p:set>
+                                  </p:childTnLst>
+                                </p:cTn>
+                              </p:par>
+                            </p:childTnLst>
+                          </p:cTn>
+                        </p:par>
+                      </p:childTnLst>
+                    </p:cTn>
+                  </p:par>
+                </p:childTnLst>
+              </p:cTn>
+              <p:prevCondLst>
+                <p:cond evt="onPrev" delay="0">
+                  <p:tgtEl>
+                    <p:sldTgt/>
+                  </p:tgtEl>
+                </p:cond>
+              </p:prevCondLst>
+              <p:nextCondLst>
+                <p:cond evt="onNext" delay="0">
+                  <p:tgtEl>
+                    <p:sldTgt/>
+                  </p:tgtEl>
+                </p:cond>
+              </p:nextCondLst>
+            </p:seq>
+          </p:childTnLst>
+        </p:cTn>
+      </p:par>
+    </p:tnLst>
+  </p:timing>
+</p:sld>
+</file>
+
+<file path=ppt/slides/slide34.xml><?xml version="1.0" encoding="utf-8"?>
+<p:sld xmlns:a="http://schemas.openxmlformats.org/drawingml/2006/main" xmlns:r="http://schemas.openxmlformats.org/officeDocument/2006/relationships" xmlns:p="http://schemas.openxmlformats.org/presentationml/2006/main">
+  <p:cSld>
+    <p:spTree>
+      <p:nvGrpSpPr>
+        <p:cNvPr id="1" name="">
+          <a:extLst>
+            <a:ext uri="{FF2B5EF4-FFF2-40B4-BE49-F238E27FC236}">
               <a16:creationId xmlns:a16="http://schemas.microsoft.com/office/drawing/2014/main" id="{577027F4-E37F-9EF5-D9EA-7AA6B2B87EEE}"/>
             </a:ext>
           </a:extLst>
@@ -13788,7 +14327,7 @@
 </p:sld>
 </file>
 
-<file path=ppt/slides/slide34.xml><?xml version="1.0" encoding="utf-8"?>
+<file path=ppt/slides/slide35.xml><?xml version="1.0" encoding="utf-8"?>
 <p:sld xmlns:a="http://schemas.openxmlformats.org/drawingml/2006/main" xmlns:r="http://schemas.openxmlformats.org/officeDocument/2006/relationships" xmlns:p="http://schemas.openxmlformats.org/presentationml/2006/main" showMasterSp="0">
   <p:cSld>
     <p:spTree>
@@ -13846,7 +14385,7 @@
 </p:sld>
 </file>
 
-<file path=ppt/slides/slide35.xml><?xml version="1.0" encoding="utf-8"?>
+<file path=ppt/slides/slide36.xml><?xml version="1.0" encoding="utf-8"?>
 <p:sld xmlns:a="http://schemas.openxmlformats.org/drawingml/2006/main" xmlns:r="http://schemas.openxmlformats.org/officeDocument/2006/relationships" xmlns:p="http://schemas.openxmlformats.org/presentationml/2006/main" showMasterSp="0">
   <p:cSld>
     <p:spTree>
@@ -14332,7 +14871,7 @@
 </p:sld>
 </file>
 
-<file path=ppt/slides/slide36.xml><?xml version="1.0" encoding="utf-8"?>
+<file path=ppt/slides/slide37.xml><?xml version="1.0" encoding="utf-8"?>
 <p:sld xmlns:a="http://schemas.openxmlformats.org/drawingml/2006/main" xmlns:r="http://schemas.openxmlformats.org/officeDocument/2006/relationships" xmlns:p="http://schemas.openxmlformats.org/presentationml/2006/main" showMasterSp="0">
   <p:cSld>
     <p:spTree>
@@ -14390,7 +14929,7 @@
 </p:sld>
 </file>
 
-<file path=ppt/slides/slide37.xml><?xml version="1.0" encoding="utf-8"?>
+<file path=ppt/slides/slide38.xml><?xml version="1.0" encoding="utf-8"?>
 <p:sld xmlns:a="http://schemas.openxmlformats.org/drawingml/2006/main" xmlns:r="http://schemas.openxmlformats.org/officeDocument/2006/relationships" xmlns:p="http://schemas.openxmlformats.org/presentationml/2006/main" showMasterSp="0">
   <p:cSld>
     <p:spTree>
@@ -14700,7 +15239,7 @@
 </p:sld>
 </file>
 
-<file path=ppt/slides/slide38.xml><?xml version="1.0" encoding="utf-8"?>
+<file path=ppt/slides/slide39.xml><?xml version="1.0" encoding="utf-8"?>
 <p:sld xmlns:a="http://schemas.openxmlformats.org/drawingml/2006/main" xmlns:r="http://schemas.openxmlformats.org/officeDocument/2006/relationships" xmlns:p="http://schemas.openxmlformats.org/presentationml/2006/main" showMasterSp="0">
   <p:cSld>
     <p:spTree>
@@ -14749,121 +15288,6 @@
     <p:extLst>
       <p:ext uri="{BB962C8B-B14F-4D97-AF65-F5344CB8AC3E}">
         <p14:creationId xmlns:p14="http://schemas.microsoft.com/office/powerpoint/2010/main" val="1276041622"/>
-      </p:ext>
-    </p:extLst>
-  </p:cSld>
-  <p:clrMapOvr>
-    <a:masterClrMapping/>
-  </p:clrMapOvr>
-</p:sld>
-</file>
-
-<file path=ppt/slides/slide39.xml><?xml version="1.0" encoding="utf-8"?>
-<p:sld xmlns:a="http://schemas.openxmlformats.org/drawingml/2006/main" xmlns:r="http://schemas.openxmlformats.org/officeDocument/2006/relationships" xmlns:p="http://schemas.openxmlformats.org/presentationml/2006/main" showMasterSp="0">
-  <p:cSld>
-    <p:spTree>
-      <p:nvGrpSpPr>
-        <p:cNvPr id="1" name=""/>
-        <p:cNvGrpSpPr/>
-        <p:nvPr/>
-      </p:nvGrpSpPr>
-      <p:grpSpPr>
-        <a:xfrm>
-          <a:off x="0" y="0"/>
-          <a:ext cx="0" cy="0"/>
-          <a:chOff x="0" y="0"/>
-          <a:chExt cx="0" cy="0"/>
-        </a:xfrm>
-      </p:grpSpPr>
-      <p:sp>
-        <p:nvSpPr>
-          <p:cNvPr id="2" name="Text Placeholder 1">
-            <a:extLst>
-              <a:ext uri="{FF2B5EF4-FFF2-40B4-BE49-F238E27FC236}">
-                <a16:creationId xmlns:a16="http://schemas.microsoft.com/office/drawing/2014/main" id="{BD9E4E97-A385-759E-BD70-47D0B91CA39E}"/>
-              </a:ext>
-            </a:extLst>
-          </p:cNvPr>
-          <p:cNvSpPr>
-            <a:spLocks noGrp="1"/>
-          </p:cNvSpPr>
-          <p:nvPr>
-            <p:ph type="body" sz="quarter" idx="10"/>
-          </p:nvPr>
-        </p:nvSpPr>
-        <p:spPr>
-          <a:xfrm>
-            <a:off x="342900" y="855080"/>
-            <a:ext cx="8455914" cy="3774069"/>
-          </a:xfrm>
-        </p:spPr>
-        <p:txBody>
-          <a:bodyPr/>
-          <a:lstStyle/>
-          <a:p>
-            <a:r>
-              <a:rPr lang="en-US" dirty="0">
-                <a:hlinkClick r:id="rId2"/>
-              </a:rPr>
-              <a:t>AzureTimes.org</a:t>
-            </a:r>
-            <a:endParaRPr lang="en-US" dirty="0">
-              <a:hlinkClick r:id="rId3"/>
-            </a:endParaRPr>
-          </a:p>
-          <a:p>
-            <a:r>
-              <a:rPr lang="en-US">
-                <a:hlinkClick r:id="rId3"/>
-              </a:rPr>
-              <a:t>Azure </a:t>
-            </a:r>
-            <a:r>
-              <a:rPr lang="en-US" dirty="0">
-                <a:hlinkClick r:id="rId3"/>
-              </a:rPr>
-              <a:t>Times GitHub Repo</a:t>
-            </a:r>
-            <a:endParaRPr lang="en-US" dirty="0"/>
-          </a:p>
-        </p:txBody>
-      </p:sp>
-      <p:sp>
-        <p:nvSpPr>
-          <p:cNvPr id="3" name="Title 2">
-            <a:extLst>
-              <a:ext uri="{FF2B5EF4-FFF2-40B4-BE49-F238E27FC236}">
-                <a16:creationId xmlns:a16="http://schemas.microsoft.com/office/drawing/2014/main" id="{78BEF490-0130-4022-0399-BE422CD7CB94}"/>
-              </a:ext>
-            </a:extLst>
-          </p:cNvPr>
-          <p:cNvSpPr>
-            <a:spLocks noGrp="1"/>
-          </p:cNvSpPr>
-          <p:nvPr>
-            <p:ph type="title"/>
-          </p:nvPr>
-        </p:nvSpPr>
-        <p:spPr/>
-        <p:txBody>
-          <a:bodyPr/>
-          <a:lstStyle/>
-          <a:p>
-            <a:r>
-              <a:rPr lang="en-US" sz="1800" dirty="0"/>
-              <a:t>Information</a:t>
-            </a:r>
-            <a:br>
-              <a:rPr lang="en-US" sz="1800" dirty="0"/>
-            </a:br>
-            <a:endParaRPr lang="en-US" dirty="0"/>
-          </a:p>
-        </p:txBody>
-      </p:sp>
-    </p:spTree>
-    <p:extLst>
-      <p:ext uri="{BB962C8B-B14F-4D97-AF65-F5344CB8AC3E}">
-        <p14:creationId xmlns:p14="http://schemas.microsoft.com/office/powerpoint/2010/main" val="747681537"/>
       </p:ext>
     </p:extLst>
   </p:cSld>
@@ -14937,6 +15361,121 @@
 </file>
 
 <file path=ppt/slides/slide40.xml><?xml version="1.0" encoding="utf-8"?>
+<p:sld xmlns:a="http://schemas.openxmlformats.org/drawingml/2006/main" xmlns:r="http://schemas.openxmlformats.org/officeDocument/2006/relationships" xmlns:p="http://schemas.openxmlformats.org/presentationml/2006/main" showMasterSp="0">
+  <p:cSld>
+    <p:spTree>
+      <p:nvGrpSpPr>
+        <p:cNvPr id="1" name=""/>
+        <p:cNvGrpSpPr/>
+        <p:nvPr/>
+      </p:nvGrpSpPr>
+      <p:grpSpPr>
+        <a:xfrm>
+          <a:off x="0" y="0"/>
+          <a:ext cx="0" cy="0"/>
+          <a:chOff x="0" y="0"/>
+          <a:chExt cx="0" cy="0"/>
+        </a:xfrm>
+      </p:grpSpPr>
+      <p:sp>
+        <p:nvSpPr>
+          <p:cNvPr id="2" name="Text Placeholder 1">
+            <a:extLst>
+              <a:ext uri="{FF2B5EF4-FFF2-40B4-BE49-F238E27FC236}">
+                <a16:creationId xmlns:a16="http://schemas.microsoft.com/office/drawing/2014/main" id="{BD9E4E97-A385-759E-BD70-47D0B91CA39E}"/>
+              </a:ext>
+            </a:extLst>
+          </p:cNvPr>
+          <p:cNvSpPr>
+            <a:spLocks noGrp="1"/>
+          </p:cNvSpPr>
+          <p:nvPr>
+            <p:ph type="body" sz="quarter" idx="10"/>
+          </p:nvPr>
+        </p:nvSpPr>
+        <p:spPr>
+          <a:xfrm>
+            <a:off x="342900" y="855080"/>
+            <a:ext cx="8455914" cy="3774069"/>
+          </a:xfrm>
+        </p:spPr>
+        <p:txBody>
+          <a:bodyPr/>
+          <a:lstStyle/>
+          <a:p>
+            <a:r>
+              <a:rPr lang="en-US" dirty="0">
+                <a:hlinkClick r:id="rId2"/>
+              </a:rPr>
+              <a:t>AzureTimes.org</a:t>
+            </a:r>
+            <a:endParaRPr lang="en-US" dirty="0">
+              <a:hlinkClick r:id="rId3"/>
+            </a:endParaRPr>
+          </a:p>
+          <a:p>
+            <a:r>
+              <a:rPr lang="en-US">
+                <a:hlinkClick r:id="rId3"/>
+              </a:rPr>
+              <a:t>Azure </a:t>
+            </a:r>
+            <a:r>
+              <a:rPr lang="en-US" dirty="0">
+                <a:hlinkClick r:id="rId3"/>
+              </a:rPr>
+              <a:t>Times GitHub Repo</a:t>
+            </a:r>
+            <a:endParaRPr lang="en-US" dirty="0"/>
+          </a:p>
+        </p:txBody>
+      </p:sp>
+      <p:sp>
+        <p:nvSpPr>
+          <p:cNvPr id="3" name="Title 2">
+            <a:extLst>
+              <a:ext uri="{FF2B5EF4-FFF2-40B4-BE49-F238E27FC236}">
+                <a16:creationId xmlns:a16="http://schemas.microsoft.com/office/drawing/2014/main" id="{78BEF490-0130-4022-0399-BE422CD7CB94}"/>
+              </a:ext>
+            </a:extLst>
+          </p:cNvPr>
+          <p:cNvSpPr>
+            <a:spLocks noGrp="1"/>
+          </p:cNvSpPr>
+          <p:nvPr>
+            <p:ph type="title"/>
+          </p:nvPr>
+        </p:nvSpPr>
+        <p:spPr/>
+        <p:txBody>
+          <a:bodyPr/>
+          <a:lstStyle/>
+          <a:p>
+            <a:r>
+              <a:rPr lang="en-US" sz="1800" dirty="0"/>
+              <a:t>Information</a:t>
+            </a:r>
+            <a:br>
+              <a:rPr lang="en-US" sz="1800" dirty="0"/>
+            </a:br>
+            <a:endParaRPr lang="en-US" dirty="0"/>
+          </a:p>
+        </p:txBody>
+      </p:sp>
+    </p:spTree>
+    <p:extLst>
+      <p:ext uri="{BB962C8B-B14F-4D97-AF65-F5344CB8AC3E}">
+        <p14:creationId xmlns:p14="http://schemas.microsoft.com/office/powerpoint/2010/main" val="747681537"/>
+      </p:ext>
+    </p:extLst>
+  </p:cSld>
+  <p:clrMapOvr>
+    <a:masterClrMapping/>
+  </p:clrMapOvr>
+</p:sld>
+</file>
+
+<file path=ppt/slides/slide41.xml><?xml version="1.0" encoding="utf-8"?>
 <p:sld xmlns:a="http://schemas.openxmlformats.org/drawingml/2006/main" xmlns:r="http://schemas.openxmlformats.org/officeDocument/2006/relationships" xmlns:p="http://schemas.openxmlformats.org/presentationml/2006/main" showMasterSp="0">
   <p:cSld>
     <p:spTree>
@@ -18360,6 +18899,15 @@
 </file>
 
 <file path=customXml/item1.xml><?xml version="1.0" encoding="utf-8"?>
+<?mso-contentType ?>
+<FormTemplates xmlns="http://schemas.microsoft.com/sharepoint/v3/contenttype/forms">
+  <Display>DocumentLibraryForm</Display>
+  <Edit>DocumentLibraryForm</Edit>
+  <New>DocumentLibraryForm</New>
+</FormTemplates>
+</file>
+
+<file path=customXml/item2.xml><?xml version="1.0" encoding="utf-8"?>
 <ct:contentTypeSchema xmlns:ct="http://schemas.microsoft.com/office/2006/metadata/contentType" xmlns:ma="http://schemas.microsoft.com/office/2006/metadata/properties/metaAttributes" ct:_="" ma:_="" ma:contentTypeName="Document" ma:contentTypeID="0x0101008C3A9FD6A1D2BC41832AF270024651C7" ma:contentTypeVersion="6" ma:contentTypeDescription="Create a new document." ma:contentTypeScope="" ma:versionID="0421700c9180782018be286cde8a21da">
   <xsd:schema xmlns:xsd="http://www.w3.org/2001/XMLSchema" xmlns:xs="http://www.w3.org/2001/XMLSchema" xmlns:p="http://schemas.microsoft.com/office/2006/metadata/properties" xmlns:ns2="2e7e23d5-2c80-4164-89d2-1708db4037b8" xmlns:ns3="4e7ac07f-2cd6-47aa-8863-e3015989625c" targetNamespace="http://schemas.microsoft.com/office/2006/metadata/properties" ma:root="true" ma:fieldsID="541d07e3f89946b63e942fc7370dae48" ns2:_="" ns3:_="">
     <xsd:import namespace="2e7e23d5-2c80-4164-89d2-1708db4037b8"/>
@@ -18538,22 +19086,21 @@
 </ct:contentTypeSchema>
 </file>
 
-<file path=customXml/item2.xml><?xml version="1.0" encoding="utf-8"?>
+<file path=customXml/item3.xml><?xml version="1.0" encoding="utf-8"?>
 <p:properties xmlns:p="http://schemas.microsoft.com/office/2006/metadata/properties" xmlns:xsi="http://www.w3.org/2001/XMLSchema-instance" xmlns:pc="http://schemas.microsoft.com/office/infopath/2007/PartnerControls">
   <documentManagement/>
 </p:properties>
 </file>
 
-<file path=customXml/item3.xml><?xml version="1.0" encoding="utf-8"?>
-<?mso-contentType ?>
-<FormTemplates xmlns="http://schemas.microsoft.com/sharepoint/v3/contenttype/forms">
-  <Display>DocumentLibraryForm</Display>
-  <Edit>DocumentLibraryForm</Edit>
-  <New>DocumentLibraryForm</New>
-</FormTemplates>
+<file path=customXml/itemProps1.xml><?xml version="1.0" encoding="utf-8"?>
+<ds:datastoreItem xmlns:ds="http://schemas.openxmlformats.org/officeDocument/2006/customXml" ds:itemID="{EE04B39D-0CBA-4F8F-8809-785207E87965}">
+  <ds:schemaRefs>
+    <ds:schemaRef ds:uri="http://schemas.microsoft.com/sharepoint/v3/contenttype/forms"/>
+  </ds:schemaRefs>
+</ds:datastoreItem>
 </file>
 
-<file path=customXml/itemProps1.xml><?xml version="1.0" encoding="utf-8"?>
+<file path=customXml/itemProps2.xml><?xml version="1.0" encoding="utf-8"?>
 <ds:datastoreItem xmlns:ds="http://schemas.openxmlformats.org/officeDocument/2006/customXml" ds:itemID="{25D63988-C0DC-4185-91C3-6687DBA2F390}">
   <ds:schemaRefs>
     <ds:schemaRef ds:uri="2e7e23d5-2c80-4164-89d2-1708db4037b8"/>
@@ -18572,7 +19119,7 @@
 </ds:datastoreItem>
 </file>
 
-<file path=customXml/itemProps2.xml><?xml version="1.0" encoding="utf-8"?>
+<file path=customXml/itemProps3.xml><?xml version="1.0" encoding="utf-8"?>
 <ds:datastoreItem xmlns:ds="http://schemas.openxmlformats.org/officeDocument/2006/customXml" ds:itemID="{4DE7C614-AA74-4D4D-9D2D-D96DA5126C78}">
   <ds:schemaRefs>
     <ds:schemaRef ds:uri="http://schemas.microsoft.com/office/2006/metadata/properties"/>
@@ -18589,14 +19136,6 @@
 </ds:datastoreItem>
 </file>
 
-<file path=customXml/itemProps3.xml><?xml version="1.0" encoding="utf-8"?>
-<ds:datastoreItem xmlns:ds="http://schemas.openxmlformats.org/officeDocument/2006/customXml" ds:itemID="{EE04B39D-0CBA-4F8F-8809-785207E87965}">
-  <ds:schemaRefs>
-    <ds:schemaRef ds:uri="http://schemas.microsoft.com/sharepoint/v3/contenttype/forms"/>
-  </ds:schemaRefs>
-</ds:datastoreItem>
-</file>
-
 <file path=docMetadata/LabelInfo.xml><?xml version="1.0" encoding="utf-8"?>
 <clbl:labelList xmlns:clbl="http://schemas.microsoft.com/office/2020/mipLabelMetadata">
   <clbl:label id="{2590e1b2-66ea-4d45-b1aa-185c322e3ba5}" enabled="1" method="Standard" siteId="{40a64d0b-f2f9-4a34-b1b3-0992ac0e5e4e}" contentBits="0" removed="0"/>
